--- a/media/resources/files/4-Amal_-_FourFour.pptx
+++ b/media/resources/files/4-Amal_-_FourFour.pptx
@@ -5747,7 +5747,7 @@
             </a:pPr>
             <a:r>
               <a:rPr lang="ru-RU" dirty="0"/>
-              <a:t>Турдуу пикирлер учун ыраазычылык билдиребиз.</a:t>
+              <a:t>Түрдүү пикирлер үчүн ыраазычылык билдиребиз.</a:t>
             </a:r>
           </a:p>
           <a:p>

--- a/media/resources/files/4-Amal_-_FourFour.pptx
+++ b/media/resources/files/4-Amal_-_FourFour.pptx
@@ -3880,7 +3880,7 @@
           <a:p>
             <a:r>
               <a:rPr lang="ru-RU" dirty="0"/>
-              <a:t>Бул ресурс математикалык ыкманын жандуу демонстрацияларын камсыз кылат.</a:t>
+              <a:t>Бул ресурс ыкманы жандуу көрсөтөт.</a:t>
             </a:r>
           </a:p>
           <a:p>
@@ -4589,7 +4589,7 @@
                   <a:srgbClr val="00B0F0"/>
                 </a:solidFill>
               </a:rPr>
-              <a:t>c</a:t>
+              <a:t>с</a:t>
             </a:r>
             <a:r>
               <a:rPr lang="ru-RU" sz="5200" dirty="0">
@@ -5288,7 +5288,7 @@
                   <a:srgbClr val="00B0F0"/>
                 </a:solidFill>
               </a:rPr>
-              <a:t>c</a:t>
+              <a:t>с</a:t>
             </a:r>
             <a:r>
               <a:rPr lang="ru-RU" sz="5200" dirty="0">
